--- a/decks/combined-bonding/combined-bonding_ch2_atoms-into-ions.pptx
+++ b/decks/combined-bonding/combined-bonding_ch2_atoms-into-ions.pptx
@@ -124,29 +124,29 @@
   <p:extLst>
     <p:ext uri="{521415D9-36F7-43E2-AB2F-B90AF26B5E84}">
       <p14:sectionLst xmlns:p14="http://schemas.microsoft.com/office/powerpoint/2010/main">
-        <p14:section name="Opening" id="{9b737976-7ed9-4f0e-b655-f4765784747f}">
+        <p14:section name="Opening" id="{f10d97aa-9ff0-f53e-0856-63eceb211db0}">
           <p14:sldIdLst>
             <p14:sldId id="256"/>
           </p14:sldIdLst>
         </p14:section>
-        <p14:section name="Gate" id="{4780b285-0ec6-87d6-20db-70fd8d1d369d}">
+        <p14:section name="Gate" id="{e7467ddd-aae7-1c1e-67e0-eadf065a5a41}">
           <p14:sldIdLst>
             <p14:sldId id="257"/>
             <p14:sldId id="258"/>
           </p14:sldIdLst>
         </p14:section>
-        <p14:section name="Pre-teach" id="{189373fe-dc02-7c72-1202-f96c109fd460}">
+        <p14:section name="Pre-teach" id="{2e488702-4bd1-5827-85ea-9c3c8a295b21}">
           <p14:sldIdLst>
             <p14:sldId id="259"/>
           </p14:sldIdLst>
         </p14:section>
-        <p14:section name="Read-along" id="{566a4bf0-184c-ae2d-0fb2-8aee8f1a40bd}">
+        <p14:section name="Read-along" id="{7a022631-c9e7-f811-30cb-77ed3002082f}">
           <p14:sldIdLst>
             <p14:sldId id="260"/>
             <p14:sldId id="261"/>
           </p14:sldIdLst>
         </p14:section>
-        <p14:section name="Teach" id="{a87c7364-59bd-a1c2-1ebe-f5d768f4e832}">
+        <p14:section name="Teach" id="{6aa08903-d6d3-9f80-3164-35198f236095}">
           <p14:sldIdLst>
             <p14:sldId id="262"/>
             <p14:sldId id="263"/>
@@ -155,19 +155,19 @@
             <p14:sldId id="266"/>
           </p14:sldIdLst>
         </p14:section>
-        <p14:section name="Routes" id="{cb464474-84bf-688f-ebba-8aa0eee31916}">
+        <p14:section name="Routes" id="{a46063cd-cac1-383d-4661-8ca431fb617c}">
           <p14:sldIdLst>
             <p14:sldId id="267"/>
             <p14:sldId id="268"/>
             <p14:sldId id="269"/>
           </p14:sldIdLst>
         </p14:section>
-        <p14:section name="Close" id="{6c16985f-5420-359a-c10e-4cb6bac5d2dd}">
+        <p14:section name="Close" id="{7f495c54-adf4-2a75-b748-fbfd7e0227b3}">
           <p14:sldIdLst>
             <p14:sldId id="270"/>
           </p14:sldIdLst>
         </p14:section>
-        <p14:section name="Answers" id="{8ae62191-218b-feb8-99fd-d00dfa01aa86}">
+        <p14:section name="Answers" id="{1d4baa3e-bc19-fa06-e198-ff006cf6e2f9}">
           <p14:sldIdLst>
             <p14:sldId id="271"/>
             <p14:sldId id="272"/>
@@ -1139,7 +1139,7 @@
               <a:rPr lang="en-US" dirty="0"/>
               <a:t>Exit ticket — individual, silent, on a slip or mini-whiteboard. Recall before help: no notes, no lanes, no hints. Collect before pupils leave.
 Question: What is an ion?
-Answer: D   An atom that has lost or gained electrons, so it has a charge. Ions form when atoms lose or gain electrons. The protons stay the same, so the charges no longer cancel.
+Answer: A   An atom that has lost or gained electrons, so it has a charge. Ions form when atoms lose or gain electrons. The protons stay the same, so the charges no longer cancel.
 Source of this question: gate item 1 re-asked (options rotated) — this chapter has no third quick-check module.
 The ebook also holds task 3, "Group to charge", for homework or the next lesson's do now.
 Sort the slips: correct → ready to move on; incorrect → start next lesson in the pre-teach group, with the read-along and the Support lane. Same destination next time.</a:t>
@@ -1322,7 +1322,7 @@
             <a:r>
               <a:rPr lang="en-US" dirty="0"/>
               <a:t>Answers — task 2: Which ion?. Reveal the answer; pupils mark their own work in a different colour, then read the "why" together. Same destination for every lane, so one answer serves the whole class.
-Answer: A   Ca²⁺, by losing 2 electrons
+Answer: B   Ca²⁺, by losing 2 electrons
 Why: Group 2 means two outer electrons; a metal loses them, giving Ca²⁺.
 Ask a Support pupil to explain one step, and a Stretch pupil to share their extension.</a:t>
             </a:r>
@@ -1413,7 +1413,7 @@
             <a:r>
               <a:rPr lang="en-US" dirty="0"/>
               <a:t>Answers — exit ticket: Exit ticket. Reveal the answer; pupils mark their own work in a different colour, then read the "why" together. Same destination for every lane, so one answer serves the whole class.
-Answer: D   An atom that has lost or gained electrons, so it has a charge
+Answer: A   An atom that has lost or gained electrons, so it has a charge
 Why: Ions form when atoms lose or gain electrons. The protons stay the same, so the charges no longer cancel.
 Ask a Support pupil to explain one step, and a Stretch pupil to share their extension.</a:t>
             </a:r>
@@ -1504,7 +1504,7 @@
             <a:r>
               <a:rPr lang="en-US" dirty="0"/>
               <a:t>Do now — retrieval. Silent, no notes, no help: recall comes before any support. Give about four minutes.
-1. What is an ion?  →  A   An atom that has lost or gained electrons, so it has a charge
+1. What is an ion?  →  B   An atom that has lost or gained electrons, so it has a charge
 2. A lithium atom has 3 electrons. It loses 1 electron to form a lithium ion. How many electrons does the lithium ion have?  →  2 electrons
 3. Fluorine is in Group 7, so a fluoride ion has a charge of ___.  →  1−
 Circulate: who gets 3/3 (Stretch route), 2/3 (Core), 0–1 (Support)? Use this to route pupils later in the lesson.</a:t>
@@ -1596,7 +1596,7 @@
             <a:r>
               <a:rPr lang="en-US" dirty="0"/>
               <a:t>Answers — pupils mark their own in a different colour, then hands up for 3/3, 2/3, 1/3.
-1. A   An atom that has lost or gained electrons, so it has a charge. Ions form when atoms lose or gain electrons. The protons stay the same, so the charges no longer cancel.
+1. B   An atom that has lost or gained electrons, so it has a charge. Ions form when atoms lose or gain electrons. The protons stay the same, so the charges no longer cancel.
 2. 2 electrons. Losing an electron takes the count down: 3 − 1 = 2 electrons. Whole-number counts, so the answer is exact.
 3. 1−. Group 7 atoms have seven outer electrons and gain one, giving a charge of 1−.
 Say the route each score points to: 3/3 Stretch, 2/3 Core, 0–1 Support. Pupils may choose to move up.</a:t>
@@ -6649,7 +6649,7 @@
                 <a:ea typeface="Calibri" pitchFamily="34" charset="-122"/>
                 <a:cs typeface="Calibri" pitchFamily="34" charset="-120"/>
               </a:rPr>
-              <a:t>Ca²⁺, by losing 2 electrons</a:t>
+              <a:t>Ca⁶⁻, by gaining 6 electrons</a:t>
             </a:r>
             <a:endParaRPr lang="en-US" sz="2600" dirty="0"/>
           </a:p>
@@ -6686,7 +6686,7 @@
                 <a:ea typeface="Calibri" pitchFamily="34" charset="-122"/>
                 <a:cs typeface="Calibri" pitchFamily="34" charset="-120"/>
               </a:rPr>
-              <a:t>Ca²⁻, by gaining 2 electrons</a:t>
+              <a:t>Ca²⁺, by losing 2 electrons</a:t>
             </a:r>
             <a:endParaRPr lang="en-US" sz="2600" dirty="0"/>
           </a:p>
@@ -6760,7 +6760,7 @@
                 <a:ea typeface="Calibri" pitchFamily="34" charset="-122"/>
                 <a:cs typeface="Calibri" pitchFamily="34" charset="-120"/>
               </a:rPr>
-              <a:t>Ca⁶⁻, by gaining 6 electrons</a:t>
+              <a:t>Ca²⁻, by gaining 2 electrons</a:t>
             </a:r>
             <a:endParaRPr lang="en-US" sz="2600" dirty="0"/>
           </a:p>
@@ -8127,7 +8127,7 @@
                 <a:ea typeface="Calibri" pitchFamily="34" charset="-122"/>
                 <a:cs typeface="Calibri" pitchFamily="34" charset="-120"/>
               </a:rPr>
-              <a:t>An atom that has lost or gained protons</a:t>
+              <a:t>An atom that has lost or gained electrons, so it has a charge</a:t>
             </a:r>
             <a:endParaRPr lang="en-US" sz="2400" dirty="0"/>
           </a:p>
@@ -8164,7 +8164,7 @@
                 <a:ea typeface="Calibri" pitchFamily="34" charset="-122"/>
                 <a:cs typeface="Calibri" pitchFamily="34" charset="-120"/>
               </a:rPr>
-              <a:t>A group of atoms with no charge</a:t>
+              <a:t>An atom that has lost or gained protons</a:t>
             </a:r>
             <a:endParaRPr lang="en-US" sz="2400" dirty="0"/>
           </a:p>
@@ -8238,7 +8238,7 @@
                 <a:ea typeface="Calibri" pitchFamily="34" charset="-122"/>
                 <a:cs typeface="Calibri" pitchFamily="34" charset="-120"/>
               </a:rPr>
-              <a:t>An atom that has lost or gained electrons, so it has a charge</a:t>
+              <a:t>A group of atoms with no charge</a:t>
             </a:r>
             <a:endParaRPr lang="en-US" sz="2400" dirty="0"/>
           </a:p>
@@ -9102,7 +9102,7 @@
                 <a:ea typeface="Cambria" pitchFamily="34" charset="-122"/>
                 <a:cs typeface="Cambria" pitchFamily="34" charset="-120"/>
               </a:rPr>
-              <a:t>A   Ca²⁺, by losing 2 electrons</a:t>
+              <a:t>B   Ca²⁺, by losing 2 electrons</a:t>
             </a:r>
             <a:endParaRPr lang="en-US" sz="1800" dirty="0"/>
           </a:p>
@@ -9561,7 +9561,7 @@
                 <a:ea typeface="Cambria" pitchFamily="34" charset="-122"/>
                 <a:cs typeface="Cambria" pitchFamily="34" charset="-120"/>
               </a:rPr>
-              <a:t>D   An atom that has lost or gained electrons, so it has a charge</a:t>
+              <a:t>A   An atom that has lost or gained electrons, so it has a charge</a:t>
             </a:r>
             <a:endParaRPr lang="en-US" sz="1800" dirty="0"/>
           </a:p>
@@ -10095,7 +10095,7 @@
                 <a:ea typeface="Calibri" pitchFamily="34" charset="-122"/>
                 <a:cs typeface="Calibri" pitchFamily="34" charset="-120"/>
               </a:rPr>
-              <a:t>An atom that has lost or gained electrons, so it has a charge</a:t>
+              <a:t>A group of atoms with no charge</a:t>
             </a:r>
             <a:endParaRPr lang="en-US" sz="1800" dirty="0"/>
           </a:p>
@@ -10132,7 +10132,7 @@
                 <a:ea typeface="Calibri" pitchFamily="34" charset="-122"/>
                 <a:cs typeface="Calibri" pitchFamily="34" charset="-120"/>
               </a:rPr>
-              <a:t>An atom that has lost or gained protons</a:t>
+              <a:t>An atom that has lost or gained electrons, so it has a charge</a:t>
             </a:r>
             <a:endParaRPr lang="en-US" sz="1800" dirty="0"/>
           </a:p>
@@ -10169,7 +10169,7 @@
                 <a:ea typeface="Calibri" pitchFamily="34" charset="-122"/>
                 <a:cs typeface="Calibri" pitchFamily="34" charset="-120"/>
               </a:rPr>
-              <a:t>A group of atoms with no charge</a:t>
+              <a:t>An atom that has lost or gained protons</a:t>
             </a:r>
             <a:endParaRPr lang="en-US" sz="1800" dirty="0"/>
           </a:p>
@@ -11003,7 +11003,7 @@
                 <a:ea typeface="Calibri" pitchFamily="34" charset="-122"/>
                 <a:cs typeface="Calibri" pitchFamily="34" charset="-120"/>
               </a:rPr>
-              <a:t>A   An atom that has lost or gained electrons, so it has a charge</a:t>
+              <a:t>B   An atom that has lost or gained electrons, so it has a charge</a:t>
             </a:r>
             <a:endParaRPr lang="en-US" sz="2200" dirty="0"/>
           </a:p>

--- a/decks/combined-bonding/combined-bonding_ch2_atoms-into-ions.pptx
+++ b/decks/combined-bonding/combined-bonding_ch2_atoms-into-ions.pptx
@@ -124,29 +124,29 @@
   <p:extLst>
     <p:ext uri="{521415D9-36F7-43E2-AB2F-B90AF26B5E84}">
       <p14:sectionLst xmlns:p14="http://schemas.microsoft.com/office/powerpoint/2010/main">
-        <p14:section name="Opening" id="{f10d97aa-9ff0-f53e-0856-63eceb211db0}">
+        <p14:section name="Opening" id="{03a8d057-f505-fd90-52ac-57d444f7533c}">
           <p14:sldIdLst>
             <p14:sldId id="256"/>
           </p14:sldIdLst>
         </p14:section>
-        <p14:section name="Gate" id="{e7467ddd-aae7-1c1e-67e0-eadf065a5a41}">
+        <p14:section name="Gate" id="{b853de1b-8331-af8e-b68f-d58735ff50e0}">
           <p14:sldIdLst>
             <p14:sldId id="257"/>
             <p14:sldId id="258"/>
           </p14:sldIdLst>
         </p14:section>
-        <p14:section name="Pre-teach" id="{2e488702-4bd1-5827-85ea-9c3c8a295b21}">
+        <p14:section name="Pre-teach" id="{9a2956f8-4ae1-cf82-f76c-45eb9c074b13}">
           <p14:sldIdLst>
             <p14:sldId id="259"/>
           </p14:sldIdLst>
         </p14:section>
-        <p14:section name="Read-along" id="{7a022631-c9e7-f811-30cb-77ed3002082f}">
+        <p14:section name="Read-along" id="{9540bb0c-93e0-dc54-949d-df98b6d5950b}">
           <p14:sldIdLst>
             <p14:sldId id="260"/>
             <p14:sldId id="261"/>
           </p14:sldIdLst>
         </p14:section>
-        <p14:section name="Teach" id="{6aa08903-d6d3-9f80-3164-35198f236095}">
+        <p14:section name="Teach" id="{7e6e2a92-3d0d-391e-85fc-7cbb85645ee8}">
           <p14:sldIdLst>
             <p14:sldId id="262"/>
             <p14:sldId id="263"/>
@@ -155,19 +155,19 @@
             <p14:sldId id="266"/>
           </p14:sldIdLst>
         </p14:section>
-        <p14:section name="Routes" id="{a46063cd-cac1-383d-4661-8ca431fb617c}">
+        <p14:section name="Routes" id="{fb439d6e-6c5c-0920-b661-3802e1bc9a10}">
           <p14:sldIdLst>
             <p14:sldId id="267"/>
             <p14:sldId id="268"/>
             <p14:sldId id="269"/>
           </p14:sldIdLst>
         </p14:section>
-        <p14:section name="Close" id="{7f495c54-adf4-2a75-b748-fbfd7e0227b3}">
+        <p14:section name="Close" id="{f52721f9-b939-fd31-1eef-42e173617d5e}">
           <p14:sldIdLst>
             <p14:sldId id="270"/>
           </p14:sldIdLst>
         </p14:section>
-        <p14:section name="Answers" id="{1d4baa3e-bc19-fa06-e198-ff006cf6e2f9}">
+        <p14:section name="Answers" id="{9b68559c-e579-b400-966d-999db03f1fb3}">
           <p14:sldIdLst>
             <p14:sldId id="271"/>
             <p14:sldId id="272"/>
